--- a/AI_for_Finance_Course/Slides/Class_12_Capstone_Certification_Review.pptx
+++ b/AI_for_Finance_Course/Slides/Class_12_Capstone_Certification_Review.pptx
@@ -499,6 +499,10 @@
           </p:nvPr>
         </p:nvSpPr>
         <p:spPr/>
+        <p:txBody>
+          <a:bodyPr/>
+          <a:p/>
+        </p:txBody>
       </p:sp>
       <p:sp>
         <p:nvSpPr>
@@ -587,6 +591,10 @@
           </p:nvPr>
         </p:nvSpPr>
         <p:spPr/>
+        <p:txBody>
+          <a:bodyPr/>
+          <a:p/>
+        </p:txBody>
       </p:sp>
       <p:sp>
         <p:nvSpPr>
@@ -675,6 +683,10 @@
           </p:nvPr>
         </p:nvSpPr>
         <p:spPr/>
+        <p:txBody>
+          <a:bodyPr/>
+          <a:p/>
+        </p:txBody>
       </p:sp>
       <p:sp>
         <p:nvSpPr>
@@ -763,6 +775,10 @@
           </p:nvPr>
         </p:nvSpPr>
         <p:spPr/>
+        <p:txBody>
+          <a:bodyPr/>
+          <a:p/>
+        </p:txBody>
       </p:sp>
       <p:sp>
         <p:nvSpPr>
@@ -851,6 +867,10 @@
           </p:nvPr>
         </p:nvSpPr>
         <p:spPr/>
+        <p:txBody>
+          <a:bodyPr/>
+          <a:p/>
+        </p:txBody>
       </p:sp>
       <p:sp>
         <p:nvSpPr>
@@ -939,6 +959,10 @@
           </p:nvPr>
         </p:nvSpPr>
         <p:spPr/>
+        <p:txBody>
+          <a:bodyPr/>
+          <a:p/>
+        </p:txBody>
       </p:sp>
       <p:sp>
         <p:nvSpPr>
@@ -1027,6 +1051,10 @@
           </p:nvPr>
         </p:nvSpPr>
         <p:spPr/>
+        <p:txBody>
+          <a:bodyPr/>
+          <a:p/>
+        </p:txBody>
       </p:sp>
       <p:sp>
         <p:nvSpPr>
@@ -1115,6 +1143,10 @@
           </p:nvPr>
         </p:nvSpPr>
         <p:spPr/>
+        <p:txBody>
+          <a:bodyPr/>
+          <a:p/>
+        </p:txBody>
       </p:sp>
       <p:sp>
         <p:nvSpPr>
@@ -1203,6 +1235,10 @@
           </p:nvPr>
         </p:nvSpPr>
         <p:spPr/>
+        <p:txBody>
+          <a:bodyPr/>
+          <a:p/>
+        </p:txBody>
       </p:sp>
       <p:sp>
         <p:nvSpPr>
@@ -1291,6 +1327,10 @@
           </p:nvPr>
         </p:nvSpPr>
         <p:spPr/>
+        <p:txBody>
+          <a:bodyPr/>
+          <a:p/>
+        </p:txBody>
       </p:sp>
       <p:sp>
         <p:nvSpPr>
@@ -1379,6 +1419,10 @@
           </p:nvPr>
         </p:nvSpPr>
         <p:spPr/>
+        <p:txBody>
+          <a:bodyPr/>
+          <a:p/>
+        </p:txBody>
       </p:sp>
       <p:sp>
         <p:nvSpPr>
@@ -1467,6 +1511,10 @@
           </p:nvPr>
         </p:nvSpPr>
         <p:spPr/>
+        <p:txBody>
+          <a:bodyPr/>
+          <a:p/>
+        </p:txBody>
       </p:sp>
       <p:sp>
         <p:nvSpPr>
@@ -1555,6 +1603,10 @@
           </p:nvPr>
         </p:nvSpPr>
         <p:spPr/>
+        <p:txBody>
+          <a:bodyPr/>
+          <a:p/>
+        </p:txBody>
       </p:sp>
       <p:sp>
         <p:nvSpPr>
@@ -1643,6 +1695,10 @@
           </p:nvPr>
         </p:nvSpPr>
         <p:spPr/>
+        <p:txBody>
+          <a:bodyPr/>
+          <a:p/>
+        </p:txBody>
       </p:sp>
       <p:sp>
         <p:nvSpPr>
@@ -1731,6 +1787,10 @@
           </p:nvPr>
         </p:nvSpPr>
         <p:spPr/>
+        <p:txBody>
+          <a:bodyPr/>
+          <a:p/>
+        </p:txBody>
       </p:sp>
       <p:sp>
         <p:nvSpPr>
@@ -1819,6 +1879,10 @@
           </p:nvPr>
         </p:nvSpPr>
         <p:spPr/>
+        <p:txBody>
+          <a:bodyPr/>
+          <a:p/>
+        </p:txBody>
       </p:sp>
       <p:sp>
         <p:nvSpPr>
@@ -2456,6 +2520,10 @@
           </a:solidFill>
           <a:ln/>
         </p:spPr>
+        <p:txBody>
+          <a:bodyPr/>
+          <a:p/>
+        </p:txBody>
       </p:sp>
       <p:sp>
         <p:nvSpPr>
@@ -2866,6 +2934,10 @@
           </a:solidFill>
           <a:ln/>
         </p:spPr>
+        <p:txBody>
+          <a:bodyPr/>
+          <a:p/>
+        </p:txBody>
       </p:sp>
       <p:sp>
         <p:nvSpPr>
@@ -3196,6 +3268,10 @@
           </a:solidFill>
           <a:ln/>
         </p:spPr>
+        <p:txBody>
+          <a:bodyPr/>
+          <a:p/>
+        </p:txBody>
       </p:sp>
       <p:sp>
         <p:nvSpPr>
@@ -3526,6 +3602,10 @@
           </a:solidFill>
           <a:ln/>
         </p:spPr>
+        <p:txBody>
+          <a:bodyPr/>
+          <a:p/>
+        </p:txBody>
       </p:sp>
       <p:sp>
         <p:nvSpPr>
@@ -3856,6 +3936,10 @@
           </a:solidFill>
           <a:ln/>
         </p:spPr>
+        <p:txBody>
+          <a:bodyPr/>
+          <a:p/>
+        </p:txBody>
       </p:sp>
       <p:sp>
         <p:nvSpPr>
@@ -4051,7 +4135,7 @@
                 <a:ea typeface="Calibri" pitchFamily="34" charset="-122"/>
                 <a:cs typeface="Calibri" pitchFamily="34" charset="-120"/>
               </a:rPr>
-              <a:t>Talent Demand: High demand for AI practitioners in finance</a:t>
+              <a:t>Talent Demand: High demand for AI professionals in finance</a:t>
             </a:r>
             <a:endParaRPr lang="en-US" sz="1400" dirty="0"/>
           </a:p>
@@ -4186,6 +4270,10 @@
           </a:solidFill>
           <a:ln/>
         </p:spPr>
+        <p:txBody>
+          <a:bodyPr/>
+          <a:p/>
+        </p:txBody>
       </p:sp>
       <p:sp>
         <p:nvSpPr>
@@ -4381,7 +4469,7 @@
                 <a:ea typeface="Calibri" pitchFamily="34" charset="-122"/>
                 <a:cs typeface="Calibri" pitchFamily="34" charset="-120"/>
               </a:rPr>
-              <a:t>Your AI journey is just beginning—keep building!</a:t>
+              <a:t>Your AI journey is just beginning. Keep building!</a:t>
             </a:r>
             <a:endParaRPr lang="en-US" sz="1400" dirty="0"/>
           </a:p>
@@ -4530,7 +4618,7 @@
                 <a:ea typeface="Calibri" pitchFamily="34" charset="-122"/>
                 <a:cs typeface="Calibri" pitchFamily="34" charset="-120"/>
               </a:rPr>
-              <a:t>Proxiant Academy — www.proxiant.com</a:t>
+              <a:t>Proxiant Academy | proxiant.ai</a:t>
             </a:r>
             <a:endParaRPr lang="en-US" sz="1400" dirty="0"/>
           </a:p>
@@ -4665,6 +4753,10 @@
           </a:solidFill>
           <a:ln/>
         </p:spPr>
+        <p:txBody>
+          <a:bodyPr/>
+          <a:p/>
+        </p:txBody>
       </p:sp>
       <p:sp>
         <p:nvSpPr>
@@ -5035,6 +5127,10 @@
           </a:solidFill>
           <a:ln/>
         </p:spPr>
+        <p:txBody>
+          <a:bodyPr/>
+          <a:p/>
+        </p:txBody>
       </p:sp>
       <p:sp>
         <p:nvSpPr>
@@ -5365,6 +5461,10 @@
           </a:solidFill>
           <a:ln/>
         </p:spPr>
+        <p:txBody>
+          <a:bodyPr/>
+          <a:p/>
+        </p:txBody>
       </p:sp>
       <p:sp>
         <p:nvSpPr>
@@ -5695,6 +5795,10 @@
           </a:solidFill>
           <a:ln/>
         </p:spPr>
+        <p:txBody>
+          <a:bodyPr/>
+          <a:p/>
+        </p:txBody>
       </p:sp>
       <p:sp>
         <p:nvSpPr>
@@ -6025,6 +6129,10 @@
           </a:solidFill>
           <a:ln/>
         </p:spPr>
+        <p:txBody>
+          <a:bodyPr/>
+          <a:p/>
+        </p:txBody>
       </p:sp>
       <p:sp>
         <p:nvSpPr>
@@ -6355,6 +6463,10 @@
           </a:solidFill>
           <a:ln/>
         </p:spPr>
+        <p:txBody>
+          <a:bodyPr/>
+          <a:p/>
+        </p:txBody>
       </p:sp>
       <p:sp>
         <p:nvSpPr>
@@ -6685,6 +6797,10 @@
           </a:solidFill>
           <a:ln/>
         </p:spPr>
+        <p:txBody>
+          <a:bodyPr/>
+          <a:p/>
+        </p:txBody>
       </p:sp>
       <p:sp>
         <p:nvSpPr>
@@ -6990,7 +7106,7 @@
                 <a:ea typeface="Georgia" pitchFamily="34" charset="-122"/>
                 <a:cs typeface="Georgia" pitchFamily="34" charset="-120"/>
               </a:rPr>
-              <a:t>Proxiant Certified AI Practitioner (PCAP)</a:t>
+              <a:t>Proxiant Certified AI Professional (PCAP)</a:t>
             </a:r>
             <a:endParaRPr lang="en-US" sz="4000" dirty="0"/>
           </a:p>
@@ -7015,6 +7131,10 @@
           </a:solidFill>
           <a:ln/>
         </p:spPr>
+        <p:txBody>
+          <a:bodyPr/>
+          <a:p/>
+        </p:txBody>
       </p:sp>
       <p:sp>
         <p:nvSpPr>
@@ -7090,7 +7210,7 @@
                 <a:ea typeface="Calibri" pitchFamily="34" charset="-122"/>
                 <a:cs typeface="Calibri" pitchFamily="34" charset="-120"/>
               </a:rPr>
-              <a:t>Passing Score: 70% (70 out of 100 questions)</a:t>
+              <a:t>Passing Score: 70% (42 of 60 questions)</a:t>
             </a:r>
             <a:endParaRPr lang="en-US" sz="1400" dirty="0"/>
           </a:p>
@@ -7130,7 +7250,7 @@
                 <a:ea typeface="Calibri" pitchFamily="34" charset="-122"/>
                 <a:cs typeface="Calibri" pitchFamily="34" charset="-120"/>
               </a:rPr>
-              <a:t>Scope: All 12 weeks of course content</a:t>
+              <a:t>Scope: all 12 classes (6 weeks) of course content</a:t>
             </a:r>
             <a:endParaRPr lang="en-US" sz="1400" dirty="0"/>
           </a:p>

--- a/AI_for_Finance_Course/Slides/Class_12_Capstone_Certification_Review.pptx
+++ b/AI_for_Finance_Course/Slides/Class_12_Capstone_Certification_Review.pptx
@@ -4349,7 +4349,7 @@
                 <a:ea typeface="Calibri" pitchFamily="34" charset="-122"/>
                 <a:cs typeface="Calibri" pitchFamily="34" charset="-120"/>
               </a:rPr>
-              <a:t>PCAP certification validates comprehensive AI finance knowledge</a:t>
+              <a:t>PCAIP certification validates comprehensive AI finance knowledge</a:t>
             </a:r>
             <a:endParaRPr lang="en-US" sz="1400" dirty="0"/>
           </a:p>
@@ -4912,7 +4912,7 @@
                 <a:ea typeface="Calibri" pitchFamily="34" charset="-122"/>
                 <a:cs typeface="Calibri" pitchFamily="34" charset="-120"/>
               </a:rPr>
-              <a:t>PCAP Certification Exam Overview</a:t>
+              <a:t>PCAIP Certification Exam Overview</a:t>
             </a:r>
             <a:endParaRPr lang="en-US" sz="1400" dirty="0"/>
           </a:p>
@@ -7106,7 +7106,7 @@
                 <a:ea typeface="Georgia" pitchFamily="34" charset="-122"/>
                 <a:cs typeface="Georgia" pitchFamily="34" charset="-120"/>
               </a:rPr>
-              <a:t>Proxiant Certified AI Professional (PCAP)</a:t>
+              <a:t>Proxiant Certified AI Professional (PCAIP)</a:t>
             </a:r>
             <a:endParaRPr lang="en-US" sz="4000" dirty="0"/>
           </a:p>
